--- a/images/assets.pptx
+++ b/images/assets.pptx
@@ -115,7 +115,7 @@
 <file path=ppt/revisionInfo.xml><?xml version="1.0" encoding="utf-8"?>
 <p1510:revInfo xmlns:a="http://schemas.openxmlformats.org/drawingml/2006/main" xmlns:r="http://schemas.openxmlformats.org/officeDocument/2006/relationships" xmlns:p1510="http://schemas.microsoft.com/office/powerpoint/2015/10/main">
   <p1510:revLst>
-    <p1510:client id="{8F396DE5-01F4-45F5-9B1A-C0B7ABED46DA}" v="2" dt="2026-07-01T16:02:06.659"/>
+    <p1510:client id="{8F396DE5-01F4-45F5-9B1A-C0B7ABED46DA}" v="23" dt="2026-07-01T18:01:23.841"/>
   </p1510:revLst>
 </p1510:revInfo>
 </file>
@@ -124,19 +124,19 @@
 <pc:chgInfo xmlns:a="http://schemas.openxmlformats.org/drawingml/2006/main" xmlns:r="http://schemas.openxmlformats.org/officeDocument/2006/relationships" xmlns:ac="http://schemas.microsoft.com/office/drawing/2013/main/command" xmlns:pc="http://schemas.microsoft.com/office/powerpoint/2013/main/command">
   <pc:docChgLst>
     <pc:chgData name="Nicolas Cachanosky" userId="543990dc0ff5ce14" providerId="LiveId" clId="{8E4DE338-F192-4434-A2D2-74D62C08B308}"/>
-    <pc:docChg chg="modSld">
-      <pc:chgData name="Nicolas Cachanosky" userId="543990dc0ff5ce14" providerId="LiveId" clId="{8E4DE338-F192-4434-A2D2-74D62C08B308}" dt="2026-07-01T16:02:06.658" v="1" actId="5736"/>
+    <pc:docChg chg="custSel modSld">
+      <pc:chgData name="Nicolas Cachanosky" userId="543990dc0ff5ce14" providerId="LiveId" clId="{8E4DE338-F192-4434-A2D2-74D62C08B308}" dt="2026-07-01T18:01:23.841" v="32" actId="5736"/>
       <pc:docMkLst>
         <pc:docMk/>
       </pc:docMkLst>
-      <pc:sldChg chg="modSp">
-        <pc:chgData name="Nicolas Cachanosky" userId="543990dc0ff5ce14" providerId="LiveId" clId="{8E4DE338-F192-4434-A2D2-74D62C08B308}" dt="2026-07-01T16:02:06.658" v="1" actId="5736"/>
+      <pc:sldChg chg="modSp mod">
+        <pc:chgData name="Nicolas Cachanosky" userId="543990dc0ff5ce14" providerId="LiveId" clId="{8E4DE338-F192-4434-A2D2-74D62C08B308}" dt="2026-07-01T18:01:23.841" v="32" actId="5736"/>
         <pc:sldMkLst>
           <pc:docMk/>
           <pc:sldMk cId="2893694639" sldId="256"/>
         </pc:sldMkLst>
-        <pc:graphicFrameChg chg="mod">
-          <ac:chgData name="Nicolas Cachanosky" userId="543990dc0ff5ce14" providerId="LiveId" clId="{8E4DE338-F192-4434-A2D2-74D62C08B308}" dt="2026-07-01T16:02:06.658" v="1" actId="5736"/>
+        <pc:graphicFrameChg chg="mod modGraphic">
+          <ac:chgData name="Nicolas Cachanosky" userId="543990dc0ff5ce14" providerId="LiveId" clId="{8E4DE338-F192-4434-A2D2-74D62C08B308}" dt="2026-07-01T18:01:23.841" v="32" actId="5736"/>
           <ac:graphicFrameMkLst>
             <pc:docMk/>
             <pc:sldMk cId="2893694639" sldId="256"/>
@@ -1094,7 +1094,7 @@
               <a:latin typeface="Inter" panose="02000503000000020004" pitchFamily="2" charset="0"/>
               <a:ea typeface="Inter" panose="02000503000000020004" pitchFamily="2" charset="0"/>
             </a:rPr>
-            <a:t>Index</a:t>
+            <a:t>LALLPI</a:t>
           </a:r>
         </a:p>
       </dgm:t>
@@ -1740,7 +1740,7 @@
       <dgm:spPr/>
     </dgm:pt>
     <dgm:pt modelId="{68B9CF64-24F6-486B-B825-F9FAEAB59425}" type="pres">
-      <dgm:prSet presAssocID="{92F187BC-471A-4206-81A0-84788834C34E}" presName="LevelTwoTextNode" presStyleLbl="node3" presStyleIdx="0" presStyleCnt="10" custScaleX="170342">
+      <dgm:prSet presAssocID="{92F187BC-471A-4206-81A0-84788834C34E}" presName="LevelTwoTextNode" presStyleLbl="node3" presStyleIdx="0" presStyleCnt="10" custScaleX="182960">
         <dgm:presLayoutVars>
           <dgm:chPref val="3"/>
         </dgm:presLayoutVars>
@@ -1764,7 +1764,7 @@
       <dgm:spPr/>
     </dgm:pt>
     <dgm:pt modelId="{BF77D77C-22A8-4062-B8C1-36B81F87CE15}" type="pres">
-      <dgm:prSet presAssocID="{DE720C3D-6A24-49F8-9BAE-E1AAAA507840}" presName="LevelTwoTextNode" presStyleLbl="node3" presStyleIdx="1" presStyleCnt="10" custScaleX="170342">
+      <dgm:prSet presAssocID="{DE720C3D-6A24-49F8-9BAE-E1AAAA507840}" presName="LevelTwoTextNode" presStyleLbl="node3" presStyleIdx="1" presStyleCnt="10" custScaleX="182960">
         <dgm:presLayoutVars>
           <dgm:chPref val="3"/>
         </dgm:presLayoutVars>
@@ -1788,7 +1788,7 @@
       <dgm:spPr/>
     </dgm:pt>
     <dgm:pt modelId="{8639AFC9-2DEA-45FD-971B-9EB92137251F}" type="pres">
-      <dgm:prSet presAssocID="{37557B41-D45C-4569-B74E-33D12EBEF03A}" presName="LevelTwoTextNode" presStyleLbl="node3" presStyleIdx="2" presStyleCnt="10" custScaleX="170342">
+      <dgm:prSet presAssocID="{37557B41-D45C-4569-B74E-33D12EBEF03A}" presName="LevelTwoTextNode" presStyleLbl="node3" presStyleIdx="2" presStyleCnt="10" custScaleX="182960">
         <dgm:presLayoutVars>
           <dgm:chPref val="3"/>
         </dgm:presLayoutVars>
@@ -1812,7 +1812,7 @@
       <dgm:spPr/>
     </dgm:pt>
     <dgm:pt modelId="{74369F3D-4CD4-40E9-8991-4527C973DD36}" type="pres">
-      <dgm:prSet presAssocID="{58CDE478-C00B-4D1F-8A7D-3C1B4FD94685}" presName="LevelTwoTextNode" presStyleLbl="node3" presStyleIdx="3" presStyleCnt="10" custScaleX="170342">
+      <dgm:prSet presAssocID="{58CDE478-C00B-4D1F-8A7D-3C1B4FD94685}" presName="LevelTwoTextNode" presStyleLbl="node3" presStyleIdx="3" presStyleCnt="10" custScaleX="182960">
         <dgm:presLayoutVars>
           <dgm:chPref val="3"/>
         </dgm:presLayoutVars>
@@ -1860,7 +1860,7 @@
       <dgm:spPr/>
     </dgm:pt>
     <dgm:pt modelId="{E7D446D8-156D-4626-B468-E79E3A9D3008}" type="pres">
-      <dgm:prSet presAssocID="{D0C70EE6-09B1-4F92-A339-E209C09644F4}" presName="LevelTwoTextNode" presStyleLbl="node3" presStyleIdx="4" presStyleCnt="10" custScaleX="170342">
+      <dgm:prSet presAssocID="{D0C70EE6-09B1-4F92-A339-E209C09644F4}" presName="LevelTwoTextNode" presStyleLbl="node3" presStyleIdx="4" presStyleCnt="10" custScaleX="182960">
         <dgm:presLayoutVars>
           <dgm:chPref val="3"/>
         </dgm:presLayoutVars>
@@ -1884,7 +1884,7 @@
       <dgm:spPr/>
     </dgm:pt>
     <dgm:pt modelId="{4975CF32-CEE5-45F9-B6A2-EADD444CA93D}" type="pres">
-      <dgm:prSet presAssocID="{2FE13282-DDEF-4673-A763-80E51551E9D4}" presName="LevelTwoTextNode" presStyleLbl="node3" presStyleIdx="5" presStyleCnt="10" custScaleX="170342">
+      <dgm:prSet presAssocID="{2FE13282-DDEF-4673-A763-80E51551E9D4}" presName="LevelTwoTextNode" presStyleLbl="node3" presStyleIdx="5" presStyleCnt="10" custScaleX="182960">
         <dgm:presLayoutVars>
           <dgm:chPref val="3"/>
         </dgm:presLayoutVars>
@@ -1908,7 +1908,7 @@
       <dgm:spPr/>
     </dgm:pt>
     <dgm:pt modelId="{8F2CEDCE-D38F-43BF-A92A-4DB6D59C7C7C}" type="pres">
-      <dgm:prSet presAssocID="{6E409ECE-E819-4BE9-8CDB-6B1CDCD4B475}" presName="LevelTwoTextNode" presStyleLbl="node3" presStyleIdx="6" presStyleCnt="10" custScaleX="170342">
+      <dgm:prSet presAssocID="{6E409ECE-E819-4BE9-8CDB-6B1CDCD4B475}" presName="LevelTwoTextNode" presStyleLbl="node3" presStyleIdx="6" presStyleCnt="10" custScaleX="182960">
         <dgm:presLayoutVars>
           <dgm:chPref val="3"/>
         </dgm:presLayoutVars>
@@ -1932,7 +1932,7 @@
       <dgm:spPr/>
     </dgm:pt>
     <dgm:pt modelId="{0C6AEA42-36DB-423B-BD05-6956E38A7AAB}" type="pres">
-      <dgm:prSet presAssocID="{285DB6EF-837B-4CEB-BAB8-D6D294EA5B8F}" presName="LevelTwoTextNode" presStyleLbl="node3" presStyleIdx="7" presStyleCnt="10" custScaleX="170342">
+      <dgm:prSet presAssocID="{285DB6EF-837B-4CEB-BAB8-D6D294EA5B8F}" presName="LevelTwoTextNode" presStyleLbl="node3" presStyleIdx="7" presStyleCnt="10" custScaleX="182960">
         <dgm:presLayoutVars>
           <dgm:chPref val="3"/>
         </dgm:presLayoutVars>
@@ -1956,7 +1956,7 @@
       <dgm:spPr/>
     </dgm:pt>
     <dgm:pt modelId="{7F6F51BD-6023-493A-B371-FE82FDB826D8}" type="pres">
-      <dgm:prSet presAssocID="{8771FC03-0DC6-4BE6-B325-A9916FF4D989}" presName="LevelTwoTextNode" presStyleLbl="node3" presStyleIdx="8" presStyleCnt="10" custScaleX="170342">
+      <dgm:prSet presAssocID="{8771FC03-0DC6-4BE6-B325-A9916FF4D989}" presName="LevelTwoTextNode" presStyleLbl="node3" presStyleIdx="8" presStyleCnt="10" custScaleX="182960">
         <dgm:presLayoutVars>
           <dgm:chPref val="3"/>
         </dgm:presLayoutVars>
@@ -1980,7 +1980,7 @@
       <dgm:spPr/>
     </dgm:pt>
     <dgm:pt modelId="{8BF88D62-89F4-4D63-BAFB-11B55313A1BF}" type="pres">
-      <dgm:prSet presAssocID="{64E59BBE-08F6-40CF-9BA5-738EC34E907B}" presName="LevelTwoTextNode" presStyleLbl="node3" presStyleIdx="9" presStyleCnt="10" custScaleX="170342">
+      <dgm:prSet presAssocID="{64E59BBE-08F6-40CF-9BA5-738EC34E907B}" presName="LevelTwoTextNode" presStyleLbl="node3" presStyleIdx="9" presStyleCnt="10" custScaleX="182960">
         <dgm:presLayoutVars>
           <dgm:chPref val="3"/>
         </dgm:presLayoutVars>
@@ -2133,7 +2133,7 @@
       </dsp:nvSpPr>
       <dsp:spPr>
         <a:xfrm>
-          <a:off x="2286107" y="3814035"/>
+          <a:off x="2240705" y="3814035"/>
           <a:ext cx="289873" cy="1380877"/>
         </a:xfrm>
         <a:custGeom>
@@ -2211,7 +2211,7 @@
         </a:p>
       </dsp:txBody>
       <dsp:txXfrm>
-        <a:off x="2395769" y="4469199"/>
+        <a:off x="2350367" y="4469199"/>
         <a:ext cx="70548" cy="70548"/>
       </dsp:txXfrm>
     </dsp:sp>
@@ -2222,7 +2222,7 @@
       </dsp:nvSpPr>
       <dsp:spPr>
         <a:xfrm>
-          <a:off x="2286107" y="3814035"/>
+          <a:off x="2240705" y="3814035"/>
           <a:ext cx="289873" cy="828526"/>
         </a:xfrm>
         <a:custGeom>
@@ -2300,7 +2300,7 @@
         </a:p>
       </dsp:txBody>
       <dsp:txXfrm>
-        <a:off x="2409099" y="4206353"/>
+        <a:off x="2363697" y="4206353"/>
         <a:ext cx="43888" cy="43888"/>
       </dsp:txXfrm>
     </dsp:sp>
@@ -2311,7 +2311,7 @@
       </dsp:nvSpPr>
       <dsp:spPr>
         <a:xfrm>
-          <a:off x="2286107" y="3814035"/>
+          <a:off x="2240705" y="3814035"/>
           <a:ext cx="289873" cy="276175"/>
         </a:xfrm>
         <a:custGeom>
@@ -2389,7 +2389,7 @@
         </a:p>
       </dsp:txBody>
       <dsp:txXfrm>
-        <a:off x="2421034" y="3942113"/>
+        <a:off x="2375632" y="3942113"/>
         <a:ext cx="20018" cy="20018"/>
       </dsp:txXfrm>
     </dsp:sp>
@@ -2400,7 +2400,7 @@
       </dsp:nvSpPr>
       <dsp:spPr>
         <a:xfrm>
-          <a:off x="2286107" y="3537859"/>
+          <a:off x="2240705" y="3537859"/>
           <a:ext cx="289873" cy="276175"/>
         </a:xfrm>
         <a:custGeom>
@@ -2478,7 +2478,7 @@
         </a:p>
       </dsp:txBody>
       <dsp:txXfrm>
-        <a:off x="2421034" y="3665938"/>
+        <a:off x="2375632" y="3665938"/>
         <a:ext cx="20018" cy="20018"/>
       </dsp:txXfrm>
     </dsp:sp>
@@ -2489,7 +2489,7 @@
       </dsp:nvSpPr>
       <dsp:spPr>
         <a:xfrm>
-          <a:off x="2286107" y="2985508"/>
+          <a:off x="2240705" y="2985508"/>
           <a:ext cx="289873" cy="828526"/>
         </a:xfrm>
         <a:custGeom>
@@ -2567,7 +2567,7 @@
         </a:p>
       </dsp:txBody>
       <dsp:txXfrm>
-        <a:off x="2409099" y="3377827"/>
+        <a:off x="2363697" y="3377827"/>
         <a:ext cx="43888" cy="43888"/>
       </dsp:txXfrm>
     </dsp:sp>
@@ -2578,7 +2578,7 @@
       </dsp:nvSpPr>
       <dsp:spPr>
         <a:xfrm>
-          <a:off x="2286107" y="2433158"/>
+          <a:off x="2240705" y="2433158"/>
           <a:ext cx="289873" cy="1380877"/>
         </a:xfrm>
         <a:custGeom>
@@ -2656,7 +2656,7 @@
         </a:p>
       </dsp:txBody>
       <dsp:txXfrm>
-        <a:off x="2395769" y="3088322"/>
+        <a:off x="2350367" y="3088322"/>
         <a:ext cx="70548" cy="70548"/>
       </dsp:txXfrm>
     </dsp:sp>
@@ -2667,7 +2667,7 @@
       </dsp:nvSpPr>
       <dsp:spPr>
         <a:xfrm>
-          <a:off x="546865" y="2433158"/>
+          <a:off x="501463" y="2433158"/>
           <a:ext cx="289873" cy="1380877"/>
         </a:xfrm>
         <a:custGeom>
@@ -2745,7 +2745,7 @@
         </a:p>
       </dsp:txBody>
       <dsp:txXfrm>
-        <a:off x="656527" y="3088322"/>
+        <a:off x="611125" y="3088322"/>
         <a:ext cx="70548" cy="70548"/>
       </dsp:txXfrm>
     </dsp:sp>
@@ -2756,7 +2756,7 @@
       </dsp:nvSpPr>
       <dsp:spPr>
         <a:xfrm>
-          <a:off x="2286107" y="1052281"/>
+          <a:off x="2240705" y="1052281"/>
           <a:ext cx="289873" cy="828526"/>
         </a:xfrm>
         <a:custGeom>
@@ -2834,7 +2834,7 @@
         </a:p>
       </dsp:txBody>
       <dsp:txXfrm>
-        <a:off x="2409099" y="1444599"/>
+        <a:off x="2363697" y="1444599"/>
         <a:ext cx="43888" cy="43888"/>
       </dsp:txXfrm>
     </dsp:sp>
@@ -2845,7 +2845,7 @@
       </dsp:nvSpPr>
       <dsp:spPr>
         <a:xfrm>
-          <a:off x="2286107" y="1052281"/>
+          <a:off x="2240705" y="1052281"/>
           <a:ext cx="289873" cy="276175"/>
         </a:xfrm>
         <a:custGeom>
@@ -2923,7 +2923,7 @@
         </a:p>
       </dsp:txBody>
       <dsp:txXfrm>
-        <a:off x="2421034" y="1180359"/>
+        <a:off x="2375632" y="1180359"/>
         <a:ext cx="20018" cy="20018"/>
       </dsp:txXfrm>
     </dsp:sp>
@@ -2934,7 +2934,7 @@
       </dsp:nvSpPr>
       <dsp:spPr>
         <a:xfrm>
-          <a:off x="2286107" y="776105"/>
+          <a:off x="2240705" y="776105"/>
           <a:ext cx="289873" cy="276175"/>
         </a:xfrm>
         <a:custGeom>
@@ -3012,7 +3012,7 @@
         </a:p>
       </dsp:txBody>
       <dsp:txXfrm>
-        <a:off x="2421034" y="904183"/>
+        <a:off x="2375632" y="904183"/>
         <a:ext cx="20018" cy="20018"/>
       </dsp:txXfrm>
     </dsp:sp>
@@ -3023,7 +3023,7 @@
       </dsp:nvSpPr>
       <dsp:spPr>
         <a:xfrm>
-          <a:off x="2286107" y="223754"/>
+          <a:off x="2240705" y="223754"/>
           <a:ext cx="289873" cy="828526"/>
         </a:xfrm>
         <a:custGeom>
@@ -3101,7 +3101,7 @@
         </a:p>
       </dsp:txBody>
       <dsp:txXfrm>
-        <a:off x="2409099" y="616073"/>
+        <a:off x="2363697" y="616073"/>
         <a:ext cx="43888" cy="43888"/>
       </dsp:txXfrm>
     </dsp:sp>
@@ -3112,7 +3112,7 @@
       </dsp:nvSpPr>
       <dsp:spPr>
         <a:xfrm>
-          <a:off x="546865" y="1052281"/>
+          <a:off x="501463" y="1052281"/>
           <a:ext cx="289873" cy="1380877"/>
         </a:xfrm>
         <a:custGeom>
@@ -3190,7 +3190,7 @@
         </a:p>
       </dsp:txBody>
       <dsp:txXfrm>
-        <a:off x="656527" y="1707445"/>
+        <a:off x="611125" y="1707445"/>
         <a:ext cx="70548" cy="70548"/>
       </dsp:txXfrm>
     </dsp:sp>
@@ -3201,7 +3201,7 @@
       </dsp:nvSpPr>
       <dsp:spPr>
         <a:xfrm rot="16200000">
-          <a:off x="-836918" y="2212217"/>
+          <a:off x="-882321" y="2212217"/>
           <a:ext cx="2325687" cy="441880"/>
         </a:xfrm>
         <a:prstGeom prst="rect">
@@ -3266,12 +3266,12 @@
               <a:latin typeface="Inter" panose="02000503000000020004" pitchFamily="2" charset="0"/>
               <a:ea typeface="Inter" panose="02000503000000020004" pitchFamily="2" charset="0"/>
             </a:rPr>
-            <a:t>Index</a:t>
+            <a:t>LALLPI</a:t>
           </a:r>
         </a:p>
       </dsp:txBody>
       <dsp:txXfrm>
-        <a:off x="-836918" y="2212217"/>
+        <a:off x="-882321" y="2212217"/>
         <a:ext cx="2325687" cy="441880"/>
       </dsp:txXfrm>
     </dsp:sp>
@@ -3282,7 +3282,7 @@
       </dsp:nvSpPr>
       <dsp:spPr>
         <a:xfrm>
-          <a:off x="836738" y="831340"/>
+          <a:off x="791336" y="831340"/>
           <a:ext cx="1449368" cy="441880"/>
         </a:xfrm>
         <a:prstGeom prst="rect">
@@ -3352,7 +3352,7 @@
         </a:p>
       </dsp:txBody>
       <dsp:txXfrm>
-        <a:off x="836738" y="831340"/>
+        <a:off x="791336" y="831340"/>
         <a:ext cx="1449368" cy="441880"/>
       </dsp:txXfrm>
     </dsp:sp>
@@ -3363,8 +3363,8 @@
       </dsp:nvSpPr>
       <dsp:spPr>
         <a:xfrm>
-          <a:off x="2575981" y="2814"/>
-          <a:ext cx="2468883" cy="441880"/>
+          <a:off x="2530578" y="2814"/>
+          <a:ext cx="2651764" cy="441880"/>
         </a:xfrm>
         <a:prstGeom prst="rect">
           <a:avLst/>
@@ -3433,8 +3433,8 @@
         </a:p>
       </dsp:txBody>
       <dsp:txXfrm>
-        <a:off x="2575981" y="2814"/>
-        <a:ext cx="2468883" cy="441880"/>
+        <a:off x="2530578" y="2814"/>
+        <a:ext cx="2651764" cy="441880"/>
       </dsp:txXfrm>
     </dsp:sp>
     <dsp:sp modelId="{BF77D77C-22A8-4062-B8C1-36B81F87CE15}">
@@ -3444,8 +3444,8 @@
       </dsp:nvSpPr>
       <dsp:spPr>
         <a:xfrm>
-          <a:off x="2575981" y="555165"/>
-          <a:ext cx="2468883" cy="441880"/>
+          <a:off x="2530578" y="555165"/>
+          <a:ext cx="2651764" cy="441880"/>
         </a:xfrm>
         <a:prstGeom prst="rect">
           <a:avLst/>
@@ -3514,8 +3514,8 @@
         </a:p>
       </dsp:txBody>
       <dsp:txXfrm>
-        <a:off x="2575981" y="555165"/>
-        <a:ext cx="2468883" cy="441880"/>
+        <a:off x="2530578" y="555165"/>
+        <a:ext cx="2651764" cy="441880"/>
       </dsp:txXfrm>
     </dsp:sp>
     <dsp:sp modelId="{8639AFC9-2DEA-45FD-971B-9EB92137251F}">
@@ -3525,8 +3525,8 @@
       </dsp:nvSpPr>
       <dsp:spPr>
         <a:xfrm>
-          <a:off x="2575981" y="1107516"/>
-          <a:ext cx="2468883" cy="441880"/>
+          <a:off x="2530578" y="1107516"/>
+          <a:ext cx="2651764" cy="441880"/>
         </a:xfrm>
         <a:prstGeom prst="rect">
           <a:avLst/>
@@ -3595,8 +3595,8 @@
         </a:p>
       </dsp:txBody>
       <dsp:txXfrm>
-        <a:off x="2575981" y="1107516"/>
-        <a:ext cx="2468883" cy="441880"/>
+        <a:off x="2530578" y="1107516"/>
+        <a:ext cx="2651764" cy="441880"/>
       </dsp:txXfrm>
     </dsp:sp>
     <dsp:sp modelId="{74369F3D-4CD4-40E9-8991-4527C973DD36}">
@@ -3606,8 +3606,8 @@
       </dsp:nvSpPr>
       <dsp:spPr>
         <a:xfrm>
-          <a:off x="2575981" y="1659866"/>
-          <a:ext cx="2468883" cy="441880"/>
+          <a:off x="2530578" y="1659866"/>
+          <a:ext cx="2651764" cy="441880"/>
         </a:xfrm>
         <a:prstGeom prst="rect">
           <a:avLst/>
@@ -3676,8 +3676,8 @@
         </a:p>
       </dsp:txBody>
       <dsp:txXfrm>
-        <a:off x="2575981" y="1659866"/>
-        <a:ext cx="2468883" cy="441880"/>
+        <a:off x="2530578" y="1659866"/>
+        <a:ext cx="2651764" cy="441880"/>
       </dsp:txXfrm>
     </dsp:sp>
     <dsp:sp modelId="{20A6B0CB-EDC2-4488-BCF4-26B3ACA01CFA}">
@@ -3687,7 +3687,7 @@
       </dsp:nvSpPr>
       <dsp:spPr>
         <a:xfrm>
-          <a:off x="836738" y="3593094"/>
+          <a:off x="791336" y="3593094"/>
           <a:ext cx="1449368" cy="441880"/>
         </a:xfrm>
         <a:prstGeom prst="rect">
@@ -3757,7 +3757,7 @@
         </a:p>
       </dsp:txBody>
       <dsp:txXfrm>
-        <a:off x="836738" y="3593094"/>
+        <a:off x="791336" y="3593094"/>
         <a:ext cx="1449368" cy="441880"/>
       </dsp:txXfrm>
     </dsp:sp>
@@ -3768,8 +3768,8 @@
       </dsp:nvSpPr>
       <dsp:spPr>
         <a:xfrm>
-          <a:off x="2575981" y="2212217"/>
-          <a:ext cx="2468883" cy="441880"/>
+          <a:off x="2530578" y="2212217"/>
+          <a:ext cx="2651764" cy="441880"/>
         </a:xfrm>
         <a:prstGeom prst="rect">
           <a:avLst/>
@@ -3842,8 +3842,8 @@
         </a:p>
       </dsp:txBody>
       <dsp:txXfrm>
-        <a:off x="2575981" y="2212217"/>
-        <a:ext cx="2468883" cy="441880"/>
+        <a:off x="2530578" y="2212217"/>
+        <a:ext cx="2651764" cy="441880"/>
       </dsp:txXfrm>
     </dsp:sp>
     <dsp:sp modelId="{4975CF32-CEE5-45F9-B6A2-EADD444CA93D}">
@@ -3853,8 +3853,8 @@
       </dsp:nvSpPr>
       <dsp:spPr>
         <a:xfrm>
-          <a:off x="2575981" y="2764568"/>
-          <a:ext cx="2468883" cy="441880"/>
+          <a:off x="2530578" y="2764568"/>
+          <a:ext cx="2651764" cy="441880"/>
         </a:xfrm>
         <a:prstGeom prst="rect">
           <a:avLst/>
@@ -3927,8 +3927,8 @@
         </a:p>
       </dsp:txBody>
       <dsp:txXfrm>
-        <a:off x="2575981" y="2764568"/>
-        <a:ext cx="2468883" cy="441880"/>
+        <a:off x="2530578" y="2764568"/>
+        <a:ext cx="2651764" cy="441880"/>
       </dsp:txXfrm>
     </dsp:sp>
     <dsp:sp modelId="{8F2CEDCE-D38F-43BF-A92A-4DB6D59C7C7C}">
@@ -3938,8 +3938,8 @@
       </dsp:nvSpPr>
       <dsp:spPr>
         <a:xfrm>
-          <a:off x="2575981" y="3316919"/>
-          <a:ext cx="2468883" cy="441880"/>
+          <a:off x="2530578" y="3316919"/>
+          <a:ext cx="2651764" cy="441880"/>
         </a:xfrm>
         <a:prstGeom prst="rect">
           <a:avLst/>
@@ -4008,8 +4008,8 @@
         </a:p>
       </dsp:txBody>
       <dsp:txXfrm>
-        <a:off x="2575981" y="3316919"/>
-        <a:ext cx="2468883" cy="441880"/>
+        <a:off x="2530578" y="3316919"/>
+        <a:ext cx="2651764" cy="441880"/>
       </dsp:txXfrm>
     </dsp:sp>
     <dsp:sp modelId="{0C6AEA42-36DB-423B-BD05-6956E38A7AAB}">
@@ -4019,8 +4019,8 @@
       </dsp:nvSpPr>
       <dsp:spPr>
         <a:xfrm>
-          <a:off x="2575981" y="3869270"/>
-          <a:ext cx="2468883" cy="441880"/>
+          <a:off x="2530578" y="3869270"/>
+          <a:ext cx="2651764" cy="441880"/>
         </a:xfrm>
         <a:prstGeom prst="rect">
           <a:avLst/>
@@ -4089,8 +4089,8 @@
         </a:p>
       </dsp:txBody>
       <dsp:txXfrm>
-        <a:off x="2575981" y="3869270"/>
-        <a:ext cx="2468883" cy="441880"/>
+        <a:off x="2530578" y="3869270"/>
+        <a:ext cx="2651764" cy="441880"/>
       </dsp:txXfrm>
     </dsp:sp>
     <dsp:sp modelId="{7F6F51BD-6023-493A-B371-FE82FDB826D8}">
@@ -4100,8 +4100,8 @@
       </dsp:nvSpPr>
       <dsp:spPr>
         <a:xfrm>
-          <a:off x="2575981" y="4421621"/>
-          <a:ext cx="2468883" cy="441880"/>
+          <a:off x="2530578" y="4421621"/>
+          <a:ext cx="2651764" cy="441880"/>
         </a:xfrm>
         <a:prstGeom prst="rect">
           <a:avLst/>
@@ -4170,8 +4170,8 @@
         </a:p>
       </dsp:txBody>
       <dsp:txXfrm>
-        <a:off x="2575981" y="4421621"/>
-        <a:ext cx="2468883" cy="441880"/>
+        <a:off x="2530578" y="4421621"/>
+        <a:ext cx="2651764" cy="441880"/>
       </dsp:txXfrm>
     </dsp:sp>
     <dsp:sp modelId="{8BF88D62-89F4-4D63-BAFB-11B55313A1BF}">
@@ -4181,8 +4181,8 @@
       </dsp:nvSpPr>
       <dsp:spPr>
         <a:xfrm>
-          <a:off x="2575981" y="4973971"/>
-          <a:ext cx="2468883" cy="441880"/>
+          <a:off x="2530578" y="4973971"/>
+          <a:ext cx="2651764" cy="441880"/>
         </a:xfrm>
         <a:prstGeom prst="rect">
           <a:avLst/>
@@ -4251,8 +4251,8 @@
         </a:p>
       </dsp:txBody>
       <dsp:txXfrm>
-        <a:off x="2575981" y="4973971"/>
-        <a:ext cx="2468883" cy="441880"/>
+        <a:off x="2530578" y="4973971"/>
+        <a:ext cx="2651764" cy="441880"/>
       </dsp:txXfrm>
     </dsp:sp>
   </dsp:spTree>
@@ -8843,14 +8843,14 @@
           <p:nvPr>
             <p:extLst>
               <p:ext uri="{D42A27DB-BD31-4B8C-83A1-F6EECF244321}">
-                <p14:modId xmlns:p14="http://schemas.microsoft.com/office/powerpoint/2010/main" val="860757536"/>
+                <p14:modId xmlns:p14="http://schemas.microsoft.com/office/powerpoint/2010/main" val="425517731"/>
               </p:ext>
             </p:extLst>
           </p:nvPr>
         </p:nvGraphicFramePr>
         <p:xfrm>
-          <a:off x="3521075" y="719666"/>
-          <a:ext cx="5149849" cy="5418667"/>
+          <a:off x="3521074" y="719666"/>
+          <a:ext cx="5241926" cy="5418667"/>
         </p:xfrm>
         <a:graphic>
           <a:graphicData uri="http://schemas.openxmlformats.org/drawingml/2006/diagram">

--- a/images/assets.pptx
+++ b/images/assets.pptx
@@ -5,7 +5,9 @@
     <p:sldMasterId id="2147483648" r:id="rId1"/>
   </p:sldMasterIdLst>
   <p:sldIdLst>
-    <p:sldId id="256" r:id="rId2"/>
+    <p:sldId id="257" r:id="rId2"/>
+    <p:sldId id="256" r:id="rId3"/>
+    <p:sldId id="258" r:id="rId4"/>
   </p:sldIdLst>
   <p:sldSz cx="12192000" cy="6858000"/>
   <p:notesSz cx="6858000" cy="9144000"/>
@@ -115,7 +117,7 @@
 <file path=ppt/revisionInfo.xml><?xml version="1.0" encoding="utf-8"?>
 <p1510:revInfo xmlns:a="http://schemas.openxmlformats.org/drawingml/2006/main" xmlns:r="http://schemas.openxmlformats.org/officeDocument/2006/relationships" xmlns:p1510="http://schemas.microsoft.com/office/powerpoint/2015/10/main">
   <p1510:revLst>
-    <p1510:client id="{8F396DE5-01F4-45F5-9B1A-C0B7ABED46DA}" v="23" dt="2026-07-01T18:01:23.841"/>
+    <p1510:client id="{8F396DE5-01F4-45F5-9B1A-C0B7ABED46DA}" v="36" dt="2026-07-01T21:28:40.560"/>
   </p1510:revLst>
 </p1510:revInfo>
 </file>
@@ -124,8 +126,8 @@
 <pc:chgInfo xmlns:a="http://schemas.openxmlformats.org/drawingml/2006/main" xmlns:r="http://schemas.openxmlformats.org/officeDocument/2006/relationships" xmlns:ac="http://schemas.microsoft.com/office/drawing/2013/main/command" xmlns:pc="http://schemas.microsoft.com/office/powerpoint/2013/main/command">
   <pc:docChgLst>
     <pc:chgData name="Nicolas Cachanosky" userId="543990dc0ff5ce14" providerId="LiveId" clId="{8E4DE338-F192-4434-A2D2-74D62C08B308}"/>
-    <pc:docChg chg="custSel modSld">
-      <pc:chgData name="Nicolas Cachanosky" userId="543990dc0ff5ce14" providerId="LiveId" clId="{8E4DE338-F192-4434-A2D2-74D62C08B308}" dt="2026-07-01T18:01:23.841" v="32" actId="5736"/>
+    <pc:docChg chg="undo custSel addSld modSld sldOrd">
+      <pc:chgData name="Nicolas Cachanosky" userId="543990dc0ff5ce14" providerId="LiveId" clId="{8E4DE338-F192-4434-A2D2-74D62C08B308}" dt="2026-07-01T21:29:56.493" v="391" actId="1076"/>
       <pc:docMkLst>
         <pc:docMk/>
       </pc:docMkLst>
@@ -143,6 +145,116 @@
             <ac:graphicFrameMk id="4" creationId="{47FC1DC4-9861-1749-982B-085CDDA60C58}"/>
           </ac:graphicFrameMkLst>
         </pc:graphicFrameChg>
+      </pc:sldChg>
+      <pc:sldChg chg="addSp modSp new mod ord">
+        <pc:chgData name="Nicolas Cachanosky" userId="543990dc0ff5ce14" providerId="LiveId" clId="{8E4DE338-F192-4434-A2D2-74D62C08B308}" dt="2026-07-01T20:12:11.922" v="69" actId="207"/>
+        <pc:sldMkLst>
+          <pc:docMk/>
+          <pc:sldMk cId="497083180" sldId="257"/>
+        </pc:sldMkLst>
+        <pc:spChg chg="add mod">
+          <ac:chgData name="Nicolas Cachanosky" userId="543990dc0ff5ce14" providerId="LiveId" clId="{8E4DE338-F192-4434-A2D2-74D62C08B308}" dt="2026-07-01T20:10:28.772" v="44" actId="2085"/>
+          <ac:spMkLst>
+            <pc:docMk/>
+            <pc:sldMk cId="497083180" sldId="257"/>
+            <ac:spMk id="2" creationId="{E135C4DA-BDE4-9E91-A8D8-6486891A186A}"/>
+          </ac:spMkLst>
+        </pc:spChg>
+        <pc:spChg chg="add mod">
+          <ac:chgData name="Nicolas Cachanosky" userId="543990dc0ff5ce14" providerId="LiveId" clId="{8E4DE338-F192-4434-A2D2-74D62C08B308}" dt="2026-07-01T20:10:59.594" v="64" actId="1076"/>
+          <ac:spMkLst>
+            <pc:docMk/>
+            <pc:sldMk cId="497083180" sldId="257"/>
+            <ac:spMk id="5" creationId="{D4B1A904-4B90-CDDC-54DB-B912CE72D17B}"/>
+          </ac:spMkLst>
+        </pc:spChg>
+        <pc:spChg chg="add mod">
+          <ac:chgData name="Nicolas Cachanosky" userId="543990dc0ff5ce14" providerId="LiveId" clId="{8E4DE338-F192-4434-A2D2-74D62C08B308}" dt="2026-07-01T20:12:11.922" v="69" actId="207"/>
+          <ac:spMkLst>
+            <pc:docMk/>
+            <pc:sldMk cId="497083180" sldId="257"/>
+            <ac:spMk id="6" creationId="{8FB1AB8B-9F3C-0C8B-789D-CCA83340E231}"/>
+          </ac:spMkLst>
+        </pc:spChg>
+        <pc:spChg chg="add mod">
+          <ac:chgData name="Nicolas Cachanosky" userId="543990dc0ff5ce14" providerId="LiveId" clId="{8E4DE338-F192-4434-A2D2-74D62C08B308}" dt="2026-07-01T20:11:36.798" v="67" actId="1076"/>
+          <ac:spMkLst>
+            <pc:docMk/>
+            <pc:sldMk cId="497083180" sldId="257"/>
+            <ac:spMk id="8" creationId="{222714DE-4192-C122-5541-E0F7DB362137}"/>
+          </ac:spMkLst>
+        </pc:spChg>
+        <pc:picChg chg="add mod">
+          <ac:chgData name="Nicolas Cachanosky" userId="543990dc0ff5ce14" providerId="LiveId" clId="{8E4DE338-F192-4434-A2D2-74D62C08B308}" dt="2026-07-01T20:11:03.326" v="65" actId="1076"/>
+          <ac:picMkLst>
+            <pc:docMk/>
+            <pc:sldMk cId="497083180" sldId="257"/>
+            <ac:picMk id="4" creationId="{1A1B506A-19A8-F7C7-917E-674ADF7431F0}"/>
+          </ac:picMkLst>
+        </pc:picChg>
+        <pc:picChg chg="add mod">
+          <ac:chgData name="Nicolas Cachanosky" userId="543990dc0ff5ce14" providerId="LiveId" clId="{8E4DE338-F192-4434-A2D2-74D62C08B308}" dt="2026-07-01T20:11:36.798" v="67" actId="1076"/>
+          <ac:picMkLst>
+            <pc:docMk/>
+            <pc:sldMk cId="497083180" sldId="257"/>
+            <ac:picMk id="7" creationId="{80CB7847-6ACD-71A9-1599-CA2FEDAD7521}"/>
+          </ac:picMkLst>
+        </pc:picChg>
+      </pc:sldChg>
+      <pc:sldChg chg="addSp delSp modSp new mod">
+        <pc:chgData name="Nicolas Cachanosky" userId="543990dc0ff5ce14" providerId="LiveId" clId="{8E4DE338-F192-4434-A2D2-74D62C08B308}" dt="2026-07-01T21:29:56.493" v="391" actId="1076"/>
+        <pc:sldMkLst>
+          <pc:docMk/>
+          <pc:sldMk cId="2392374437" sldId="258"/>
+        </pc:sldMkLst>
+        <pc:spChg chg="add del mod">
+          <ac:chgData name="Nicolas Cachanosky" userId="543990dc0ff5ce14" providerId="LiveId" clId="{8E4DE338-F192-4434-A2D2-74D62C08B308}" dt="2026-07-01T21:29:32.413" v="388" actId="478"/>
+          <ac:spMkLst>
+            <pc:docMk/>
+            <pc:sldMk cId="2392374437" sldId="258"/>
+            <ac:spMk id="2" creationId="{231E8D01-CD12-FF9B-4AA1-1DBC38D8B8E0}"/>
+          </ac:spMkLst>
+        </pc:spChg>
+        <pc:spChg chg="add mod">
+          <ac:chgData name="Nicolas Cachanosky" userId="543990dc0ff5ce14" providerId="LiveId" clId="{8E4DE338-F192-4434-A2D2-74D62C08B308}" dt="2026-07-01T21:22:17.560" v="123" actId="1076"/>
+          <ac:spMkLst>
+            <pc:docMk/>
+            <pc:sldMk cId="2392374437" sldId="258"/>
+            <ac:spMk id="3" creationId="{EDD1A13A-9306-6E0D-3CA0-79BEA0D8D417}"/>
+          </ac:spMkLst>
+        </pc:spChg>
+        <pc:spChg chg="add del mod">
+          <ac:chgData name="Nicolas Cachanosky" userId="543990dc0ff5ce14" providerId="LiveId" clId="{8E4DE338-F192-4434-A2D2-74D62C08B308}" dt="2026-07-01T21:29:14.622" v="385" actId="478"/>
+          <ac:spMkLst>
+            <pc:docMk/>
+            <pc:sldMk cId="2392374437" sldId="258"/>
+            <ac:spMk id="6" creationId="{F8F0F14D-DDAE-8C0A-D25F-1C242A147BCD}"/>
+          </ac:spMkLst>
+        </pc:spChg>
+        <pc:picChg chg="add mod">
+          <ac:chgData name="Nicolas Cachanosky" userId="543990dc0ff5ce14" providerId="LiveId" clId="{8E4DE338-F192-4434-A2D2-74D62C08B308}" dt="2026-07-01T21:22:54.392" v="146" actId="1076"/>
+          <ac:picMkLst>
+            <pc:docMk/>
+            <pc:sldMk cId="2392374437" sldId="258"/>
+            <ac:picMk id="5" creationId="{7C2BD73E-0960-D959-B2E2-C97111A686C9}"/>
+          </ac:picMkLst>
+        </pc:picChg>
+        <pc:picChg chg="add mod ord">
+          <ac:chgData name="Nicolas Cachanosky" userId="543990dc0ff5ce14" providerId="LiveId" clId="{8E4DE338-F192-4434-A2D2-74D62C08B308}" dt="2026-07-01T21:29:36.034" v="390" actId="1076"/>
+          <ac:picMkLst>
+            <pc:docMk/>
+            <pc:sldMk cId="2392374437" sldId="258"/>
+            <ac:picMk id="10" creationId="{A5DED756-0E77-ECB8-CB1A-D09F7C33E82D}"/>
+          </ac:picMkLst>
+        </pc:picChg>
+        <pc:cxnChg chg="add mod">
+          <ac:chgData name="Nicolas Cachanosky" userId="543990dc0ff5ce14" providerId="LiveId" clId="{8E4DE338-F192-4434-A2D2-74D62C08B308}" dt="2026-07-01T21:29:56.493" v="391" actId="1076"/>
+          <ac:cxnSpMkLst>
+            <pc:docMk/>
+            <pc:sldMk cId="2392374437" sldId="258"/>
+            <ac:cxnSpMk id="8" creationId="{81482657-4D06-39E9-9920-892C7EE4AB4F}"/>
+          </ac:cxnSpMkLst>
+        </pc:cxnChg>
       </pc:sldChg>
     </pc:docChg>
   </pc:docChgLst>
@@ -8830,6 +8942,299 @@
           <a:chExt cx="0" cy="0"/>
         </a:xfrm>
       </p:grpSpPr>
+      <p:sp>
+        <p:nvSpPr>
+          <p:cNvPr id="2" name="Rectangle 1">
+            <a:extLst>
+              <a:ext uri="{FF2B5EF4-FFF2-40B4-BE49-F238E27FC236}">
+                <a16:creationId xmlns:a16="http://schemas.microsoft.com/office/drawing/2014/main" id="{E135C4DA-BDE4-9E91-A8D8-6486891A186A}"/>
+              </a:ext>
+            </a:extLst>
+          </p:cNvPr>
+          <p:cNvSpPr/>
+          <p:nvPr/>
+        </p:nvSpPr>
+        <p:spPr>
+          <a:xfrm>
+            <a:off x="1304925" y="1390650"/>
+            <a:ext cx="3657600" cy="3657600"/>
+          </a:xfrm>
+          <a:prstGeom prst="rect">
+            <a:avLst/>
+          </a:prstGeom>
+          <a:ln>
+            <a:noFill/>
+          </a:ln>
+        </p:spPr>
+        <p:style>
+          <a:lnRef idx="2">
+            <a:schemeClr val="accent1">
+              <a:shade val="15000"/>
+            </a:schemeClr>
+          </a:lnRef>
+          <a:fillRef idx="1">
+            <a:schemeClr val="accent1"/>
+          </a:fillRef>
+          <a:effectRef idx="0">
+            <a:schemeClr val="accent1"/>
+          </a:effectRef>
+          <a:fontRef idx="minor">
+            <a:schemeClr val="lt1"/>
+          </a:fontRef>
+        </p:style>
+        <p:txBody>
+          <a:bodyPr rtlCol="0" anchor="ctr"/>
+          <a:lstStyle/>
+          <a:p>
+            <a:pPr algn="ctr"/>
+            <a:endParaRPr lang="en-US"/>
+          </a:p>
+        </p:txBody>
+      </p:sp>
+      <p:pic>
+        <p:nvPicPr>
+          <p:cNvPr id="4" name="Graphic 3" descr="South America with solid fill">
+            <a:extLst>
+              <a:ext uri="{FF2B5EF4-FFF2-40B4-BE49-F238E27FC236}">
+                <a16:creationId xmlns:a16="http://schemas.microsoft.com/office/drawing/2014/main" id="{1A1B506A-19A8-F7C7-917E-674ADF7431F0}"/>
+              </a:ext>
+            </a:extLst>
+          </p:cNvPr>
+          <p:cNvPicPr>
+            <a:picLocks noChangeAspect="1"/>
+          </p:cNvPicPr>
+          <p:nvPr/>
+        </p:nvPicPr>
+        <p:blipFill>
+          <a:blip>
+            <a:extLst>
+              <a:ext uri="{96DAC541-7B7A-43D3-8B79-37D633B846F1}">
+                <asvg:svgBlip xmlns:asvg="http://schemas.microsoft.com/office/drawing/2016/SVG/main" r:embed="rId2"/>
+              </a:ext>
+            </a:extLst>
+          </a:blip>
+          <a:stretch>
+            <a:fillRect/>
+          </a:stretch>
+        </p:blipFill>
+        <p:spPr>
+          <a:xfrm>
+            <a:off x="2462212" y="3309640"/>
+            <a:ext cx="1371600" cy="1371600"/>
+          </a:xfrm>
+          <a:prstGeom prst="rect">
+            <a:avLst/>
+          </a:prstGeom>
+        </p:spPr>
+      </p:pic>
+      <p:sp>
+        <p:nvSpPr>
+          <p:cNvPr id="5" name="TextBox 4">
+            <a:extLst>
+              <a:ext uri="{FF2B5EF4-FFF2-40B4-BE49-F238E27FC236}">
+                <a16:creationId xmlns:a16="http://schemas.microsoft.com/office/drawing/2014/main" id="{D4B1A904-4B90-CDDC-54DB-B912CE72D17B}"/>
+              </a:ext>
+            </a:extLst>
+          </p:cNvPr>
+          <p:cNvSpPr txBox="1"/>
+          <p:nvPr/>
+        </p:nvSpPr>
+        <p:spPr>
+          <a:xfrm>
+            <a:off x="1914525" y="2019300"/>
+            <a:ext cx="2466975" cy="923330"/>
+          </a:xfrm>
+          <a:prstGeom prst="rect">
+            <a:avLst/>
+          </a:prstGeom>
+          <a:noFill/>
+        </p:spPr>
+        <p:txBody>
+          <a:bodyPr wrap="square" rtlCol="0">
+            <a:spAutoFit/>
+          </a:bodyPr>
+          <a:lstStyle/>
+          <a:p>
+            <a:pPr algn="ctr"/>
+            <a:r>
+              <a:rPr lang="en-US" sz="5400" dirty="0">
+                <a:solidFill>
+                  <a:schemeClr val="bg1"/>
+                </a:solidFill>
+              </a:rPr>
+              <a:t>LALLPI</a:t>
+            </a:r>
+            <a:endParaRPr lang="en-US" dirty="0">
+              <a:solidFill>
+                <a:schemeClr val="bg1"/>
+              </a:solidFill>
+            </a:endParaRPr>
+          </a:p>
+        </p:txBody>
+      </p:sp>
+      <p:sp>
+        <p:nvSpPr>
+          <p:cNvPr id="6" name="Rectangle 5">
+            <a:extLst>
+              <a:ext uri="{FF2B5EF4-FFF2-40B4-BE49-F238E27FC236}">
+                <a16:creationId xmlns:a16="http://schemas.microsoft.com/office/drawing/2014/main" id="{8FB1AB8B-9F3C-0C8B-789D-CCA83340E231}"/>
+              </a:ext>
+            </a:extLst>
+          </p:cNvPr>
+          <p:cNvSpPr/>
+          <p:nvPr/>
+        </p:nvSpPr>
+        <p:spPr>
+          <a:xfrm>
+            <a:off x="7229475" y="1390650"/>
+            <a:ext cx="3657600" cy="3657600"/>
+          </a:xfrm>
+          <a:prstGeom prst="rect">
+            <a:avLst/>
+          </a:prstGeom>
+          <a:solidFill>
+            <a:schemeClr val="accent2"/>
+          </a:solidFill>
+          <a:ln>
+            <a:noFill/>
+          </a:ln>
+        </p:spPr>
+        <p:style>
+          <a:lnRef idx="2">
+            <a:schemeClr val="accent1">
+              <a:shade val="15000"/>
+            </a:schemeClr>
+          </a:lnRef>
+          <a:fillRef idx="1">
+            <a:schemeClr val="accent1"/>
+          </a:fillRef>
+          <a:effectRef idx="0">
+            <a:schemeClr val="accent1"/>
+          </a:effectRef>
+          <a:fontRef idx="minor">
+            <a:schemeClr val="lt1"/>
+          </a:fontRef>
+        </p:style>
+        <p:txBody>
+          <a:bodyPr rtlCol="0" anchor="ctr"/>
+          <a:lstStyle/>
+          <a:p>
+            <a:pPr algn="ctr"/>
+            <a:endParaRPr lang="en-US"/>
+          </a:p>
+        </p:txBody>
+      </p:sp>
+      <p:pic>
+        <p:nvPicPr>
+          <p:cNvPr id="7" name="Graphic 6" descr="South America with solid fill">
+            <a:extLst>
+              <a:ext uri="{FF2B5EF4-FFF2-40B4-BE49-F238E27FC236}">
+                <a16:creationId xmlns:a16="http://schemas.microsoft.com/office/drawing/2014/main" id="{80CB7847-6ACD-71A9-1599-CA2FEDAD7521}"/>
+              </a:ext>
+            </a:extLst>
+          </p:cNvPr>
+          <p:cNvPicPr>
+            <a:picLocks noChangeAspect="1"/>
+          </p:cNvPicPr>
+          <p:nvPr/>
+        </p:nvPicPr>
+        <p:blipFill>
+          <a:blip>
+            <a:extLst>
+              <a:ext uri="{96DAC541-7B7A-43D3-8B79-37D633B846F1}">
+                <asvg:svgBlip xmlns:asvg="http://schemas.microsoft.com/office/drawing/2016/SVG/main" r:embed="rId2"/>
+              </a:ext>
+            </a:extLst>
+          </a:blip>
+          <a:stretch>
+            <a:fillRect/>
+          </a:stretch>
+        </p:blipFill>
+        <p:spPr>
+          <a:xfrm>
+            <a:off x="8386762" y="3309640"/>
+            <a:ext cx="1371600" cy="1371600"/>
+          </a:xfrm>
+          <a:prstGeom prst="rect">
+            <a:avLst/>
+          </a:prstGeom>
+        </p:spPr>
+      </p:pic>
+      <p:sp>
+        <p:nvSpPr>
+          <p:cNvPr id="8" name="TextBox 7">
+            <a:extLst>
+              <a:ext uri="{FF2B5EF4-FFF2-40B4-BE49-F238E27FC236}">
+                <a16:creationId xmlns:a16="http://schemas.microsoft.com/office/drawing/2014/main" id="{222714DE-4192-C122-5541-E0F7DB362137}"/>
+              </a:ext>
+            </a:extLst>
+          </p:cNvPr>
+          <p:cNvSpPr txBox="1"/>
+          <p:nvPr/>
+        </p:nvSpPr>
+        <p:spPr>
+          <a:xfrm>
+            <a:off x="7839075" y="2019300"/>
+            <a:ext cx="2466975" cy="923330"/>
+          </a:xfrm>
+          <a:prstGeom prst="rect">
+            <a:avLst/>
+          </a:prstGeom>
+          <a:noFill/>
+        </p:spPr>
+        <p:txBody>
+          <a:bodyPr wrap="square" rtlCol="0">
+            <a:spAutoFit/>
+          </a:bodyPr>
+          <a:lstStyle/>
+          <a:p>
+            <a:pPr algn="ctr"/>
+            <a:r>
+              <a:rPr lang="en-US" sz="5400" dirty="0">
+                <a:solidFill>
+                  <a:schemeClr val="bg1"/>
+                </a:solidFill>
+              </a:rPr>
+              <a:t>LALLPI</a:t>
+            </a:r>
+            <a:endParaRPr lang="en-US" dirty="0">
+              <a:solidFill>
+                <a:schemeClr val="bg1"/>
+              </a:solidFill>
+            </a:endParaRPr>
+          </a:p>
+        </p:txBody>
+      </p:sp>
+    </p:spTree>
+    <p:extLst>
+      <p:ext uri="{BB962C8B-B14F-4D97-AF65-F5344CB8AC3E}">
+        <p14:creationId xmlns:p14="http://schemas.microsoft.com/office/powerpoint/2010/main" val="497083180"/>
+      </p:ext>
+    </p:extLst>
+  </p:cSld>
+  <p:clrMapOvr>
+    <a:masterClrMapping/>
+  </p:clrMapOvr>
+</p:sld>
+</file>
+
+<file path=ppt/slides/slide2.xml><?xml version="1.0" encoding="utf-8"?>
+<p:sld xmlns:a="http://schemas.openxmlformats.org/drawingml/2006/main" xmlns:r="http://schemas.openxmlformats.org/officeDocument/2006/relationships" xmlns:p="http://schemas.openxmlformats.org/presentationml/2006/main">
+  <p:cSld>
+    <p:spTree>
+      <p:nvGrpSpPr>
+        <p:cNvPr id="1" name=""/>
+        <p:cNvGrpSpPr/>
+        <p:nvPr/>
+      </p:nvGrpSpPr>
+      <p:grpSpPr>
+        <a:xfrm>
+          <a:off x="0" y="0"/>
+          <a:ext cx="0" cy="0"/>
+          <a:chOff x="0" y="0"/>
+          <a:chExt cx="0" cy="0"/>
+        </a:xfrm>
+      </p:grpSpPr>
       <p:graphicFrame>
         <p:nvGraphicFramePr>
           <p:cNvPr id="4" name="Diagram 3">
@@ -8871,6 +9276,340 @@
 </p:sld>
 </file>
 
+<file path=ppt/slides/slide3.xml><?xml version="1.0" encoding="utf-8"?>
+<p:sld xmlns:a="http://schemas.openxmlformats.org/drawingml/2006/main" xmlns:r="http://schemas.openxmlformats.org/officeDocument/2006/relationships" xmlns:p="http://schemas.openxmlformats.org/presentationml/2006/main">
+  <p:cSld>
+    <p:spTree>
+      <p:nvGrpSpPr>
+        <p:cNvPr id="1" name=""/>
+        <p:cNvGrpSpPr/>
+        <p:nvPr/>
+      </p:nvGrpSpPr>
+      <p:grpSpPr>
+        <a:xfrm>
+          <a:off x="0" y="0"/>
+          <a:ext cx="0" cy="0"/>
+          <a:chOff x="0" y="0"/>
+          <a:chExt cx="0" cy="0"/>
+        </a:xfrm>
+      </p:grpSpPr>
+      <p:pic>
+        <p:nvPicPr>
+          <p:cNvPr id="10" name="Picture 9">
+            <a:extLst>
+              <a:ext uri="{FF2B5EF4-FFF2-40B4-BE49-F238E27FC236}">
+                <a16:creationId xmlns:a16="http://schemas.microsoft.com/office/drawing/2014/main" id="{A5DED756-0E77-ECB8-CB1A-D09F7C33E82D}"/>
+              </a:ext>
+            </a:extLst>
+          </p:cNvPr>
+          <p:cNvPicPr>
+            <a:picLocks/>
+          </p:cNvPicPr>
+          <p:nvPr/>
+        </p:nvPicPr>
+        <p:blipFill>
+          <a:blip r:embed="rId2">
+            <a:extLst>
+              <a:ext uri="{28A0092B-C50C-407E-A947-70E740481C1C}">
+                <a14:useLocalDpi xmlns:a14="http://schemas.microsoft.com/office/drawing/2010/main" val="0"/>
+              </a:ext>
+              <a:ext uri="{837473B0-CC2E-450A-ABE3-18F120FF3D39}">
+                <a1611:picAttrSrcUrl xmlns:a1611="http://schemas.microsoft.com/office/drawing/2016/11/main" r:id="rId3"/>
+              </a:ext>
+            </a:extLst>
+          </a:blip>
+          <a:srcRect/>
+          <a:stretch/>
+        </p:blipFill>
+        <p:spPr>
+          <a:xfrm>
+            <a:off x="3049" y="379473"/>
+            <a:ext cx="12188951" cy="6099049"/>
+          </a:xfrm>
+          <a:prstGeom prst="rect">
+            <a:avLst/>
+          </a:prstGeom>
+        </p:spPr>
+      </p:pic>
+      <p:sp>
+        <p:nvSpPr>
+          <p:cNvPr id="3" name="Rectangle 2">
+            <a:extLst>
+              <a:ext uri="{FF2B5EF4-FFF2-40B4-BE49-F238E27FC236}">
+                <a16:creationId xmlns:a16="http://schemas.microsoft.com/office/drawing/2014/main" id="{EDD1A13A-9306-6E0D-3CA0-79BEA0D8D417}"/>
+              </a:ext>
+            </a:extLst>
+          </p:cNvPr>
+          <p:cNvSpPr>
+            <a:spLocks/>
+          </p:cNvSpPr>
+          <p:nvPr/>
+        </p:nvSpPr>
+        <p:spPr>
+          <a:xfrm>
+            <a:off x="0" y="379474"/>
+            <a:ext cx="4379976" cy="6099049"/>
+          </a:xfrm>
+          <a:prstGeom prst="rect">
+            <a:avLst/>
+          </a:prstGeom>
+          <a:solidFill>
+            <a:schemeClr val="accent1"/>
+          </a:solidFill>
+          <a:ln w="3175">
+            <a:noFill/>
+          </a:ln>
+        </p:spPr>
+        <p:style>
+          <a:lnRef idx="2">
+            <a:schemeClr val="accent1">
+              <a:shade val="15000"/>
+            </a:schemeClr>
+          </a:lnRef>
+          <a:fillRef idx="1">
+            <a:schemeClr val="accent1"/>
+          </a:fillRef>
+          <a:effectRef idx="0">
+            <a:schemeClr val="accent1"/>
+          </a:effectRef>
+          <a:fontRef idx="minor">
+            <a:schemeClr val="lt1"/>
+          </a:fontRef>
+        </p:style>
+        <p:txBody>
+          <a:bodyPr rtlCol="0" anchor="ctr"/>
+          <a:lstStyle/>
+          <a:p>
+            <a:pPr algn="ctr"/>
+            <a:endParaRPr lang="en-US"/>
+          </a:p>
+        </p:txBody>
+      </p:sp>
+      <p:pic>
+        <p:nvPicPr>
+          <p:cNvPr id="5" name="Graphic 4" descr="South America with solid fill">
+            <a:extLst>
+              <a:ext uri="{FF2B5EF4-FFF2-40B4-BE49-F238E27FC236}">
+                <a16:creationId xmlns:a16="http://schemas.microsoft.com/office/drawing/2014/main" id="{7C2BD73E-0960-D959-B2E2-C97111A686C9}"/>
+              </a:ext>
+            </a:extLst>
+          </p:cNvPr>
+          <p:cNvPicPr>
+            <a:picLocks noChangeAspect="1"/>
+          </p:cNvPicPr>
+          <p:nvPr/>
+        </p:nvPicPr>
+        <p:blipFill>
+          <a:blip>
+            <a:extLst>
+              <a:ext uri="{96DAC541-7B7A-43D3-8B79-37D633B846F1}">
+                <asvg:svgBlip xmlns:asvg="http://schemas.microsoft.com/office/drawing/2016/SVG/main" r:embed="rId4"/>
+              </a:ext>
+            </a:extLst>
+          </a:blip>
+          <a:stretch>
+            <a:fillRect/>
+          </a:stretch>
+        </p:blipFill>
+        <p:spPr>
+          <a:xfrm>
+            <a:off x="0" y="1239010"/>
+            <a:ext cx="4379976" cy="4379976"/>
+          </a:xfrm>
+          <a:prstGeom prst="rect">
+            <a:avLst/>
+          </a:prstGeom>
+        </p:spPr>
+      </p:pic>
+      <p:sp>
+        <p:nvSpPr>
+          <p:cNvPr id="6" name="Rectangle 5">
+            <a:extLst>
+              <a:ext uri="{FF2B5EF4-FFF2-40B4-BE49-F238E27FC236}">
+                <a16:creationId xmlns:a16="http://schemas.microsoft.com/office/drawing/2014/main" id="{F8F0F14D-DDAE-8C0A-D25F-1C242A147BCD}"/>
+              </a:ext>
+            </a:extLst>
+          </p:cNvPr>
+          <p:cNvSpPr/>
+          <p:nvPr/>
+        </p:nvSpPr>
+        <p:spPr>
+          <a:xfrm>
+            <a:off x="4709160" y="379474"/>
+            <a:ext cx="7479792" cy="6099049"/>
+          </a:xfrm>
+          <a:prstGeom prst="rect">
+            <a:avLst/>
+          </a:prstGeom>
+          <a:noFill/>
+          <a:ln>
+            <a:solidFill>
+              <a:schemeClr val="bg1"/>
+            </a:solidFill>
+          </a:ln>
+        </p:spPr>
+        <p:style>
+          <a:lnRef idx="2">
+            <a:schemeClr val="accent1">
+              <a:shade val="15000"/>
+            </a:schemeClr>
+          </a:lnRef>
+          <a:fillRef idx="1">
+            <a:schemeClr val="accent1"/>
+          </a:fillRef>
+          <a:effectRef idx="0">
+            <a:schemeClr val="accent1"/>
+          </a:effectRef>
+          <a:fontRef idx="minor">
+            <a:schemeClr val="lt1"/>
+          </a:fontRef>
+        </p:style>
+        <p:txBody>
+          <a:bodyPr rtlCol="0" anchor="ctr"/>
+          <a:lstStyle/>
+          <a:p>
+            <a:r>
+              <a:rPr lang="en-US" sz="6600" b="1" dirty="0">
+                <a:solidFill>
+                  <a:schemeClr val="accent2"/>
+                </a:solidFill>
+              </a:rPr>
+              <a:t>LALLPI</a:t>
+            </a:r>
+          </a:p>
+          <a:p>
+            <a:r>
+              <a:rPr lang="en-US" sz="2400" dirty="0">
+                <a:solidFill>
+                  <a:schemeClr val="accent2"/>
+                </a:solidFill>
+              </a:rPr>
+              <a:t>Latin American Left-Leaning Populism Index</a:t>
+            </a:r>
+          </a:p>
+          <a:p>
+            <a:endParaRPr lang="en-US" dirty="0">
+              <a:solidFill>
+                <a:schemeClr val="accent2"/>
+              </a:solidFill>
+            </a:endParaRPr>
+          </a:p>
+          <a:p>
+            <a:endParaRPr lang="en-US" dirty="0">
+              <a:solidFill>
+                <a:schemeClr val="accent2"/>
+              </a:solidFill>
+            </a:endParaRPr>
+          </a:p>
+          <a:p>
+            <a:endParaRPr lang="en-US" dirty="0">
+              <a:solidFill>
+                <a:schemeClr val="accent2"/>
+              </a:solidFill>
+            </a:endParaRPr>
+          </a:p>
+          <a:p>
+            <a:r>
+              <a:rPr lang="en-US" i="1" dirty="0">
+                <a:solidFill>
+                  <a:schemeClr val="accent2"/>
+                </a:solidFill>
+              </a:rPr>
+              <a:t>Does populist rhetoric become populist policy?</a:t>
+            </a:r>
+          </a:p>
+          <a:p>
+            <a:endParaRPr lang="en-US" i="1" dirty="0">
+              <a:solidFill>
+                <a:schemeClr val="accent2"/>
+              </a:solidFill>
+            </a:endParaRPr>
+          </a:p>
+          <a:p>
+            <a:r>
+              <a:rPr lang="en-US" sz="1400" dirty="0">
+                <a:solidFill>
+                  <a:schemeClr val="accent3">
+                    <a:lumMod val="50000"/>
+                  </a:schemeClr>
+                </a:solidFill>
+              </a:rPr>
+              <a:t>25 countries • 2000-2020</a:t>
+            </a:r>
+          </a:p>
+          <a:p>
+            <a:endParaRPr lang="en-US" b="1" dirty="0">
+              <a:solidFill>
+                <a:schemeClr val="accent2"/>
+              </a:solidFill>
+            </a:endParaRPr>
+          </a:p>
+          <a:p>
+            <a:r>
+              <a:rPr lang="en-US" b="1" dirty="0" err="1">
+                <a:solidFill>
+                  <a:schemeClr val="accent2"/>
+                </a:solidFill>
+              </a:rPr>
+              <a:t>lallpi.netlify.app</a:t>
+            </a:r>
+            <a:endParaRPr lang="en-US" b="1" dirty="0">
+              <a:solidFill>
+                <a:schemeClr val="accent2"/>
+              </a:solidFill>
+            </a:endParaRPr>
+          </a:p>
+        </p:txBody>
+      </p:sp>
+      <p:cxnSp>
+        <p:nvCxnSpPr>
+          <p:cNvPr id="8" name="Straight Connector 7">
+            <a:extLst>
+              <a:ext uri="{FF2B5EF4-FFF2-40B4-BE49-F238E27FC236}">
+                <a16:creationId xmlns:a16="http://schemas.microsoft.com/office/drawing/2014/main" id="{81482657-4D06-39E9-9920-892C7EE4AB4F}"/>
+              </a:ext>
+            </a:extLst>
+          </p:cNvPr>
+          <p:cNvCxnSpPr/>
+          <p:nvPr/>
+        </p:nvCxnSpPr>
+        <p:spPr>
+          <a:xfrm>
+            <a:off x="4798695" y="3409947"/>
+            <a:ext cx="1920240" cy="0"/>
+          </a:xfrm>
+          <a:prstGeom prst="line">
+            <a:avLst/>
+          </a:prstGeom>
+        </p:spPr>
+        <p:style>
+          <a:lnRef idx="3">
+            <a:schemeClr val="accent1"/>
+          </a:lnRef>
+          <a:fillRef idx="0">
+            <a:schemeClr val="accent1"/>
+          </a:fillRef>
+          <a:effectRef idx="2">
+            <a:schemeClr val="accent1"/>
+          </a:effectRef>
+          <a:fontRef idx="minor">
+            <a:schemeClr val="tx1"/>
+          </a:fontRef>
+        </p:style>
+      </p:cxnSp>
+    </p:spTree>
+    <p:extLst>
+      <p:ext uri="{BB962C8B-B14F-4D97-AF65-F5344CB8AC3E}">
+        <p14:creationId xmlns:p14="http://schemas.microsoft.com/office/powerpoint/2010/main" val="2392374437"/>
+      </p:ext>
+    </p:extLst>
+  </p:cSld>
+  <p:clrMapOvr>
+    <a:masterClrMapping/>
+  </p:clrMapOvr>
+</p:sld>
+</file>
+
 <file path=ppt/theme/theme1.xml><?xml version="1.0" encoding="utf-8"?>
 <a:theme xmlns:a="http://schemas.openxmlformats.org/drawingml/2006/main" name="Office Theme">
   <a:themeElements>
@@ -8894,16 +9633,16 @@
         <a:srgbClr val="041E42"/>
       </a:accent2>
       <a:accent3>
-        <a:srgbClr val="B1B3B3"/>
+        <a:srgbClr val="D9D9D6"/>
       </a:accent3>
       <a:accent4>
-        <a:srgbClr val="4A5A62"/>
+        <a:srgbClr val="1CA6DF"/>
       </a:accent4>
       <a:accent5>
-        <a:srgbClr val="6B8A47"/>
+        <a:srgbClr val="FFD600"/>
       </a:accent5>
       <a:accent6>
-        <a:srgbClr val="9D6B2F"/>
+        <a:srgbClr val="4E4B48"/>
       </a:accent6>
       <a:hlink>
         <a:srgbClr val="F5F3EB"/>
@@ -8912,14 +9651,14 @@
         <a:srgbClr val="B26B02"/>
       </a:folHlink>
     </a:clrScheme>
-    <a:fontScheme name="UTEP 2">
+    <a:fontScheme name="UTEP - Sans Serif">
       <a:majorFont>
-        <a:latin typeface="Roboto Condensed"/>
+        <a:latin typeface="Inter"/>
         <a:ea typeface=""/>
         <a:cs typeface=""/>
       </a:majorFont>
       <a:minorFont>
-        <a:latin typeface="Open Sans"/>
+        <a:latin typeface="Inter"/>
         <a:ea typeface=""/>
         <a:cs typeface=""/>
       </a:minorFont>
